--- a/week2_LinuxII/week2.pptx
+++ b/week2_LinuxII/week2.pptx
@@ -232,7 +232,7 @@
           <a:p>
             <a:fld id="{B2232C89-3CE2-794F-879C-0967E0975631}" type="datetimeFigureOut">
               <a:rPr lang="en-US" smtClean="0"/>
-              <a:t>8/29/25</a:t>
+              <a:t>8/28/26</a:t>
             </a:fld>
             <a:endParaRPr lang="en-US"/>
           </a:p>
@@ -1182,7 +1182,7 @@
           <a:p>
             <a:fld id="{92B9ACA4-847D-214F-8693-F6FBD8D9F22E}" type="datetimeFigureOut">
               <a:rPr lang="en-US" smtClean="0"/>
-              <a:t>8/29/25</a:t>
+              <a:t>8/28/26</a:t>
             </a:fld>
             <a:endParaRPr lang="en-US"/>
           </a:p>
@@ -1350,7 +1350,7 @@
           <a:p>
             <a:fld id="{92B9ACA4-847D-214F-8693-F6FBD8D9F22E}" type="datetimeFigureOut">
               <a:rPr lang="en-US" smtClean="0"/>
-              <a:t>8/29/25</a:t>
+              <a:t>8/28/26</a:t>
             </a:fld>
             <a:endParaRPr lang="en-US"/>
           </a:p>
@@ -1528,7 +1528,7 @@
           <a:p>
             <a:fld id="{92B9ACA4-847D-214F-8693-F6FBD8D9F22E}" type="datetimeFigureOut">
               <a:rPr lang="en-US" smtClean="0"/>
-              <a:t>8/29/25</a:t>
+              <a:t>8/28/26</a:t>
             </a:fld>
             <a:endParaRPr lang="en-US"/>
           </a:p>
@@ -1696,7 +1696,7 @@
           <a:p>
             <a:fld id="{92B9ACA4-847D-214F-8693-F6FBD8D9F22E}" type="datetimeFigureOut">
               <a:rPr lang="en-US" smtClean="0"/>
-              <a:t>8/29/25</a:t>
+              <a:t>8/28/26</a:t>
             </a:fld>
             <a:endParaRPr lang="en-US"/>
           </a:p>
@@ -1941,7 +1941,7 @@
           <a:p>
             <a:fld id="{92B9ACA4-847D-214F-8693-F6FBD8D9F22E}" type="datetimeFigureOut">
               <a:rPr lang="en-US" smtClean="0"/>
-              <a:t>8/29/25</a:t>
+              <a:t>8/28/26</a:t>
             </a:fld>
             <a:endParaRPr lang="en-US"/>
           </a:p>
@@ -2226,7 +2226,7 @@
           <a:p>
             <a:fld id="{92B9ACA4-847D-214F-8693-F6FBD8D9F22E}" type="datetimeFigureOut">
               <a:rPr lang="en-US" smtClean="0"/>
-              <a:t>8/29/25</a:t>
+              <a:t>8/28/26</a:t>
             </a:fld>
             <a:endParaRPr lang="en-US"/>
           </a:p>
@@ -2645,7 +2645,7 @@
           <a:p>
             <a:fld id="{92B9ACA4-847D-214F-8693-F6FBD8D9F22E}" type="datetimeFigureOut">
               <a:rPr lang="en-US" smtClean="0"/>
-              <a:t>8/29/25</a:t>
+              <a:t>8/28/26</a:t>
             </a:fld>
             <a:endParaRPr lang="en-US"/>
           </a:p>
@@ -2762,7 +2762,7 @@
           <a:p>
             <a:fld id="{92B9ACA4-847D-214F-8693-F6FBD8D9F22E}" type="datetimeFigureOut">
               <a:rPr lang="en-US" smtClean="0"/>
-              <a:t>8/29/25</a:t>
+              <a:t>8/28/26</a:t>
             </a:fld>
             <a:endParaRPr lang="en-US"/>
           </a:p>
@@ -2857,7 +2857,7 @@
           <a:p>
             <a:fld id="{92B9ACA4-847D-214F-8693-F6FBD8D9F22E}" type="datetimeFigureOut">
               <a:rPr lang="en-US" smtClean="0"/>
-              <a:t>8/29/25</a:t>
+              <a:t>8/28/26</a:t>
             </a:fld>
             <a:endParaRPr lang="en-US"/>
           </a:p>
@@ -3132,7 +3132,7 @@
           <a:p>
             <a:fld id="{92B9ACA4-847D-214F-8693-F6FBD8D9F22E}" type="datetimeFigureOut">
               <a:rPr lang="en-US" smtClean="0"/>
-              <a:t>8/29/25</a:t>
+              <a:t>8/28/26</a:t>
             </a:fld>
             <a:endParaRPr lang="en-US"/>
           </a:p>
@@ -3384,7 +3384,7 @@
           <a:p>
             <a:fld id="{92B9ACA4-847D-214F-8693-F6FBD8D9F22E}" type="datetimeFigureOut">
               <a:rPr lang="en-US" smtClean="0"/>
-              <a:t>8/29/25</a:t>
+              <a:t>8/28/26</a:t>
             </a:fld>
             <a:endParaRPr lang="en-US"/>
           </a:p>
@@ -3595,7 +3595,7 @@
           <a:p>
             <a:fld id="{92B9ACA4-847D-214F-8693-F6FBD8D9F22E}" type="datetimeFigureOut">
               <a:rPr lang="en-US" smtClean="0"/>
-              <a:t>8/29/25</a:t>
+              <a:t>8/28/26</a:t>
             </a:fld>
             <a:endParaRPr lang="en-US"/>
           </a:p>
@@ -4010,7 +4010,7 @@
         <p:spPr>
           <a:xfrm>
             <a:off x="203200" y="1690062"/>
-            <a:ext cx="8940800" cy="3816429"/>
+            <a:ext cx="8940800" cy="3477875"/>
           </a:xfrm>
           <a:prstGeom prst="rect">
             <a:avLst/>
@@ -4028,16 +4028,10 @@
               <a:buChar char="-"/>
             </a:pPr>
             <a:r>
-              <a:rPr lang="en-US" sz="2200" b="1" dirty="0">
-                <a:latin typeface="Helvetica Light" panose="020B0403020202020204" pitchFamily="34" charset="0"/>
-              </a:rPr>
-              <a:t>m</a:t>
-            </a:r>
-            <a:r>
               <a:rPr lang="en-US" sz="2200" dirty="0">
                 <a:latin typeface="Helvetica Light" panose="020B0403020202020204" pitchFamily="34" charset="0"/>
               </a:rPr>
-              <a:t>ore Linux commands and command line arguments, </a:t>
+              <a:t>more Linux commands and command line arguments, </a:t>
             </a:r>
             <a:r>
               <a:rPr lang="en-US" sz="2200" b="1" dirty="0">
@@ -4921,7 +4915,7 @@
               <a:rPr lang="en-US" b="1" dirty="0" err="1">
                 <a:latin typeface="Helvetica Light" panose="020B0403020202020204" pitchFamily="34" charset="0"/>
               </a:rPr>
-              <a:t>TextWrangler</a:t>
+              <a:t>VScode</a:t>
             </a:r>
             <a:r>
               <a:rPr lang="en-US" b="1" dirty="0">
@@ -6518,8 +6512,8 @@
         </p:nvSpPr>
         <p:spPr>
           <a:xfrm>
-            <a:off x="4800679" y="1819325"/>
-            <a:ext cx="4094965" cy="3293209"/>
+            <a:off x="4362756" y="1545328"/>
+            <a:ext cx="4217197" cy="3293209"/>
           </a:xfrm>
           <a:prstGeom prst="rect">
             <a:avLst/>
@@ -7187,7 +7181,19 @@
               <a:rPr lang="en-US" sz="2200" dirty="0">
                 <a:latin typeface="Helvetica Light" panose="020B0403020202020204" pitchFamily="34" charset="0"/>
               </a:rPr>
-              <a:t>Among the most widely used Unix command in data science</a:t>
+              <a:t>Among the most widely used </a:t>
+            </a:r>
+            <a:r>
+              <a:rPr lang="en-US" sz="2200" dirty="0" err="1">
+                <a:latin typeface="Helvetica Light" panose="020B0403020202020204" pitchFamily="34" charset="0"/>
+              </a:rPr>
+              <a:t>linux</a:t>
+            </a:r>
+            <a:r>
+              <a:rPr lang="en-US" sz="2200" dirty="0">
+                <a:latin typeface="Helvetica Light" panose="020B0403020202020204" pitchFamily="34" charset="0"/>
+              </a:rPr>
+              <a:t> commands in data science</a:t>
             </a:r>
           </a:p>
           <a:p>
@@ -8257,7 +8263,7 @@
         <p:spPr>
           <a:xfrm>
             <a:off x="347133" y="1228252"/>
-            <a:ext cx="8111067" cy="4832092"/>
+            <a:ext cx="8111067" cy="4770537"/>
           </a:xfrm>
           <a:prstGeom prst="rect">
             <a:avLst/>
@@ -8337,15 +8343,7 @@
               <a:rPr lang="en-US" sz="2200" dirty="0">
                 <a:latin typeface="Helvetica Light" panose="020B0403020202020204" pitchFamily="34" charset="0"/>
               </a:rPr>
-              <a:t>2. Feel solid about chapters 4 and 5 in Haddock and Dunn, </a:t>
-            </a:r>
-          </a:p>
-          <a:p>
-            <a:r>
-              <a:rPr lang="en-US" sz="2200" dirty="0">
-                <a:latin typeface="Helvetica Light" panose="020B0403020202020204" pitchFamily="34" charset="0"/>
-              </a:rPr>
-              <a:t>    have a peek at Chapter 16.</a:t>
+              <a:t>2. Feel solid about content in chapters 4 and 5 in Haddock and Dunn, consider having a peek at Chapter 16.</a:t>
             </a:r>
           </a:p>
           <a:p>
@@ -8482,8 +8480,8 @@
         </p:nvSpPr>
         <p:spPr>
           <a:xfrm>
-            <a:off x="1440373" y="949366"/>
-            <a:ext cx="6263253" cy="523220"/>
+            <a:off x="921470" y="533868"/>
+            <a:ext cx="7545655" cy="615553"/>
           </a:xfrm>
           <a:prstGeom prst="rect">
             <a:avLst/>
@@ -8497,7 +8495,7 @@
           <a:lstStyle/>
           <a:p>
             <a:r>
-              <a:rPr lang="en-US" sz="2800" dirty="0">
+              <a:rPr lang="en-US" sz="3400" dirty="0">
                 <a:latin typeface="Helvetica Light" panose="020B0403020202020204" pitchFamily="34" charset="0"/>
               </a:rPr>
               <a:t>Independent project idea discussion?</a:t>
@@ -8514,7 +8512,7 @@
         <p:spPr>
           <a:xfrm>
             <a:off x="782620" y="2296518"/>
-            <a:ext cx="7394223" cy="1754326"/>
+            <a:ext cx="7394223" cy="2677656"/>
           </a:xfrm>
           <a:prstGeom prst="rect">
             <a:avLst/>
@@ -8528,36 +8526,36 @@
           <a:lstStyle/>
           <a:p>
             <a:r>
-              <a:rPr lang="en-US" dirty="0">
+              <a:rPr lang="en-US" sz="2400" dirty="0">
                 <a:latin typeface="Helvetica Light" panose="020B0403020202020204" pitchFamily="34" charset="0"/>
               </a:rPr>
               <a:t>Could be as simple as writing python scripts for everyone in the class to have for really simple things</a:t>
             </a:r>
           </a:p>
           <a:p>
-            <a:endParaRPr lang="en-US" dirty="0">
+            <a:endParaRPr lang="en-US" sz="2400" dirty="0">
               <a:latin typeface="Helvetica Light" panose="020B0403020202020204" pitchFamily="34" charset="0"/>
             </a:endParaRPr>
           </a:p>
           <a:p>
             <a:r>
-              <a:rPr lang="en-US" dirty="0">
+              <a:rPr lang="en-US" sz="2400" dirty="0">
                 <a:latin typeface="Helvetica Light" panose="020B0403020202020204" pitchFamily="34" charset="0"/>
               </a:rPr>
               <a:t>OR</a:t>
             </a:r>
           </a:p>
           <a:p>
-            <a:endParaRPr lang="en-US" dirty="0">
+            <a:endParaRPr lang="en-US" sz="2400" dirty="0">
               <a:latin typeface="Helvetica Light" panose="020B0403020202020204" pitchFamily="34" charset="0"/>
             </a:endParaRPr>
           </a:p>
           <a:p>
             <a:r>
-              <a:rPr lang="en-US" dirty="0">
-                <a:latin typeface="Helvetica Light" panose="020B0403020202020204" pitchFamily="34" charset="0"/>
-              </a:rPr>
-              <a:t>As complex as genome assembly pipeline.</a:t>
+              <a:rPr lang="en-US" sz="2400" dirty="0">
+                <a:latin typeface="Helvetica Light" panose="020B0403020202020204" pitchFamily="34" charset="0"/>
+              </a:rPr>
+              <a:t>As complex as genome assembly and analysis pipeline.</a:t>
             </a:r>
           </a:p>
         </p:txBody>
@@ -9946,31 +9944,31 @@
           <a:lstStyle/>
           <a:p>
             <a:r>
-              <a:rPr lang="en-US" sz="2800" dirty="0">
+              <a:rPr lang="en-US" sz="2800" b="1" dirty="0">
                 <a:latin typeface="Helvetica Light" panose="020B0403020202020204" pitchFamily="34" charset="0"/>
               </a:rPr>
               <a:t>.</a:t>
             </a:r>
             <a:r>
-              <a:rPr lang="en-US" sz="2800" dirty="0" err="1">
+              <a:rPr lang="en-US" sz="2800" b="1" dirty="0" err="1">
                 <a:latin typeface="Helvetica Light" panose="020B0403020202020204" pitchFamily="34" charset="0"/>
               </a:rPr>
               <a:t>zshrc</a:t>
             </a:r>
             <a:r>
-              <a:rPr lang="en-US" sz="2800" dirty="0">
+              <a:rPr lang="en-US" sz="2800" b="1" dirty="0">
                 <a:latin typeface="Helvetica Light" panose="020B0403020202020204" pitchFamily="34" charset="0"/>
               </a:rPr>
               <a:t> (or .</a:t>
             </a:r>
             <a:r>
-              <a:rPr lang="en-US" sz="2800" dirty="0" err="1">
+              <a:rPr lang="en-US" sz="2800" b="1" dirty="0" err="1">
                 <a:latin typeface="Helvetica Light" panose="020B0403020202020204" pitchFamily="34" charset="0"/>
               </a:rPr>
               <a:t>bash_profile</a:t>
             </a:r>
             <a:r>
-              <a:rPr lang="en-US" sz="2800" dirty="0">
+              <a:rPr lang="en-US" sz="2800" b="1" dirty="0">
                 <a:latin typeface="Helvetica Light" panose="020B0403020202020204" pitchFamily="34" charset="0"/>
               </a:rPr>
               <a:t>)</a:t>
